--- a/enterprise-architectuur/niveau-1/deel-04/slidedeck.pptx
+++ b/enterprise-architectuur/niveau-1/deel-04/slidedeck.pptx
@@ -4419,7 +4419,7 @@
       </p:sp>
       <p:pic>
         <p:nvPicPr>
-          <p:cNvPr id="3" name="Image 0" descr="c:\Projecten\eductus-trainingen\EnterpriseArchitectuur\_bouwstenen\figuren-generated\fig_4_2_waardestroom_heatmap.png">    </p:cNvPr>
+          <p:cNvPr id="3" name="Image 0" descr="C:\Projecten\eductus.nl\enterprise-architectuur\figuren\deel-04\fig_4_2_waardestroom_heatmap.png">    </p:cNvPr>
           <p:cNvPicPr>
             <a:picLocks noChangeAspect="1"/>
           </p:cNvPicPr>
